--- a/decks/maths-directed/maths-directed_ch2_crossing-zero-zero-pairs.pptx
+++ b/decks/maths-directed/maths-directed_ch2_crossing-zero-zero-pairs.pptx
@@ -121,47 +121,47 @@
   <p:extLst>
     <p:ext uri="{521415D9-36F7-43E2-AB2F-B90AF26B5E84}">
       <p14:sectionLst xmlns:p14="http://schemas.microsoft.com/office/powerpoint/2010/main">
-        <p14:section name="Opening" id="{085b0454-f693-5286-2320-81a4c086e629}">
+        <p14:section name="Opening" id="{7e87986a-d9c7-bf6b-05d0-9930b1357a85}">
           <p14:sldIdLst>
             <p14:sldId id="256"/>
           </p14:sldIdLst>
         </p14:section>
-        <p14:section name="Gate" id="{4d5c58bc-e291-07ca-70ae-88b06b00a926}">
+        <p14:section name="Gate" id="{967a3afb-9341-71c9-deee-8f29ba7364a3}">
           <p14:sldIdLst>
             <p14:sldId id="257"/>
             <p14:sldId id="258"/>
           </p14:sldIdLst>
         </p14:section>
-        <p14:section name="Pre-teach" id="{e3169898-091c-9e29-4856-ac2d5678d718}">
+        <p14:section name="Pre-teach" id="{ecd31e5d-ed62-232f-7a4d-a14bfe9c5331}">
           <p14:sldIdLst>
             <p14:sldId id="259"/>
           </p14:sldIdLst>
         </p14:section>
-        <p14:section name="Read-along" id="{5852c576-c6c4-2f99-99e1-3c683516b825}">
+        <p14:section name="Read-along" id="{fbc94af0-e6fe-c5c8-a53e-0538c383eebf}">
           <p14:sldIdLst>
             <p14:sldId id="260"/>
             <p14:sldId id="261"/>
           </p14:sldIdLst>
         </p14:section>
-        <p14:section name="Teach" id="{8727026c-02a3-9da3-c5c7-34eca44a4e97}">
+        <p14:section name="Teach" id="{3056a7b4-d7ff-5472-ea67-467ffd210975}">
           <p14:sldIdLst>
             <p14:sldId id="262"/>
             <p14:sldId id="263"/>
             <p14:sldId id="264"/>
           </p14:sldIdLst>
         </p14:section>
-        <p14:section name="Routes" id="{640cb7a8-6af5-01c7-2d00-f5327272a55f}">
+        <p14:section name="Routes" id="{b5708244-d9b5-cfa4-0398-d97ef5a229c9}">
           <p14:sldIdLst>
             <p14:sldId id="265"/>
             <p14:sldId id="266"/>
           </p14:sldIdLst>
         </p14:section>
-        <p14:section name="Close" id="{bfc1a992-1ada-128b-4fef-06d579bf615b}">
+        <p14:section name="Close" id="{5b93ffef-a050-2c32-c609-cc6e8833b541}">
           <p14:sldIdLst>
             <p14:sldId id="267"/>
           </p14:sldIdLst>
         </p14:section>
-        <p14:section name="Answers" id="{5c6ba6c8-9b0e-7d86-edf5-bfb596e4e784}">
+        <p14:section name="Answers" id="{c4ec92a2-91bb-290f-5835-f55a89c895fb}">
           <p14:sldIdLst>
             <p14:sldId id="268"/>
             <p14:sldId id="269"/>
@@ -1219,7 +1219,7 @@
               <a:t>Do now — retrieval. Silent, no notes, no help: recall comes before any support. Give about four minutes.
 1. Work out 5 − 9.  →  −4
 2. Work out −3 + 10.  →  7
-3. Which set of counters is worth zero?  →  B   4 positive and 4 negative
+3. Which set of counters is worth zero?  →  D   4 positive and 4 negative
 Circulate: who gets 3/3 (Stretch route), 2/3 (Core), 0–1 (Support)? Use this to route pupils later in the lesson.</a:t>
             </a:r>
             <a:endParaRPr lang="en-US" dirty="0"/>
@@ -1311,7 +1311,7 @@
               <a:t>Answers — pupils mark their own in a different colour, then hands up for 3/3, 2/3, 1/3.
 1. −4. Take 5 to reach zero, then 4 more. You land on −4.
 2. 7. Add 3 to reach zero, then 7 more. You land on 7.
-3. B   4 positive and 4 negative. Equal numbers of positive and negative counters make only zero pairs, so the value is 0.
+3. D   4 positive and 4 negative. Equal numbers of positive and negative counters make only zero pairs, so the value is 0.
 Say the route each score points to: 3/3 Stretch, 2/3 Core, 0–1 Support. Pupils may choose to move up.</a:t>
             </a:r>
             <a:endParaRPr lang="en-US" dirty="0"/>
@@ -8097,7 +8097,7 @@
                 <a:ea typeface="Calibri" pitchFamily="34" charset="-122"/>
                 <a:cs typeface="Calibri" pitchFamily="34" charset="-120"/>
               </a:rPr>
-              <a:t>3 positive and 2 negative</a:t>
+              <a:t>2 positive and 6 negative</a:t>
             </a:r>
             <a:endParaRPr lang="en-US" sz="2000" dirty="0"/>
           </a:p>
@@ -8134,7 +8134,7 @@
                 <a:ea typeface="Calibri" pitchFamily="34" charset="-122"/>
                 <a:cs typeface="Calibri" pitchFamily="34" charset="-120"/>
               </a:rPr>
-              <a:t>4 positive and 4 negative</a:t>
+              <a:t>5 positive and 1 negative</a:t>
             </a:r>
             <a:endParaRPr lang="en-US" sz="2000" dirty="0"/>
           </a:p>
@@ -8171,7 +8171,7 @@
                 <a:ea typeface="Calibri" pitchFamily="34" charset="-122"/>
                 <a:cs typeface="Calibri" pitchFamily="34" charset="-120"/>
               </a:rPr>
-              <a:t>5 positive and 1 negative</a:t>
+              <a:t>3 positive and 2 negative</a:t>
             </a:r>
             <a:endParaRPr lang="en-US" sz="2000" dirty="0"/>
           </a:p>
@@ -8208,7 +8208,7 @@
                 <a:ea typeface="Calibri" pitchFamily="34" charset="-122"/>
                 <a:cs typeface="Calibri" pitchFamily="34" charset="-120"/>
               </a:rPr>
-              <a:t>2 positive and 6 negative</a:t>
+              <a:t>4 positive and 4 negative</a:t>
             </a:r>
             <a:endParaRPr lang="en-US" sz="2000" dirty="0"/>
           </a:p>
@@ -9109,7 +9109,7 @@
                 <a:ea typeface="Calibri" pitchFamily="34" charset="-122"/>
                 <a:cs typeface="Calibri" pitchFamily="34" charset="-120"/>
               </a:rPr>
-              <a:t>B   4 positive and 4 negative</a:t>
+              <a:t>D   4 positive and 4 negative</a:t>
             </a:r>
             <a:endParaRPr lang="en-US" sz="2200" dirty="0"/>
           </a:p>

--- a/decks/maths-directed/maths-directed_ch2_crossing-zero-zero-pairs.pptx
+++ b/decks/maths-directed/maths-directed_ch2_crossing-zero-zero-pairs.pptx
@@ -121,47 +121,47 @@
   <p:extLst>
     <p:ext uri="{521415D9-36F7-43E2-AB2F-B90AF26B5E84}">
       <p14:sectionLst xmlns:p14="http://schemas.microsoft.com/office/powerpoint/2010/main">
-        <p14:section name="Opening" id="{7e87986a-d9c7-bf6b-05d0-9930b1357a85}">
+        <p14:section name="Opening" id="{bb9e7e3e-1ed8-4d35-a550-caf7b8fd71c4}">
           <p14:sldIdLst>
             <p14:sldId id="256"/>
           </p14:sldIdLst>
         </p14:section>
-        <p14:section name="Gate" id="{967a3afb-9341-71c9-deee-8f29ba7364a3}">
+        <p14:section name="Gate" id="{7abf0cea-510e-891a-9b43-6be5000b1773}">
           <p14:sldIdLst>
             <p14:sldId id="257"/>
             <p14:sldId id="258"/>
           </p14:sldIdLst>
         </p14:section>
-        <p14:section name="Pre-teach" id="{ecd31e5d-ed62-232f-7a4d-a14bfe9c5331}">
+        <p14:section name="Pre-teach" id="{39de4270-3e6a-e4ba-abe0-d010446b8a6d}">
           <p14:sldIdLst>
             <p14:sldId id="259"/>
           </p14:sldIdLst>
         </p14:section>
-        <p14:section name="Read-along" id="{fbc94af0-e6fe-c5c8-a53e-0538c383eebf}">
+        <p14:section name="Read-along" id="{4a8fbfd5-e741-0a37-617d-b111f9fec21e}">
           <p14:sldIdLst>
             <p14:sldId id="260"/>
             <p14:sldId id="261"/>
           </p14:sldIdLst>
         </p14:section>
-        <p14:section name="Teach" id="{3056a7b4-d7ff-5472-ea67-467ffd210975}">
+        <p14:section name="Teach" id="{1d48f41a-874b-1559-31a9-65d05e29115f}">
           <p14:sldIdLst>
             <p14:sldId id="262"/>
             <p14:sldId id="263"/>
             <p14:sldId id="264"/>
           </p14:sldIdLst>
         </p14:section>
-        <p14:section name="Routes" id="{b5708244-d9b5-cfa4-0398-d97ef5a229c9}">
+        <p14:section name="Routes" id="{49f0e1f1-4f9d-6e70-6be8-840ef1f2f763}">
           <p14:sldIdLst>
             <p14:sldId id="265"/>
             <p14:sldId id="266"/>
           </p14:sldIdLst>
         </p14:section>
-        <p14:section name="Close" id="{5b93ffef-a050-2c32-c609-cc6e8833b541}">
+        <p14:section name="Close" id="{75822a7c-ad91-5f41-7ca3-e373403864c7}">
           <p14:sldIdLst>
             <p14:sldId id="267"/>
           </p14:sldIdLst>
         </p14:section>
-        <p14:section name="Answers" id="{c4ec92a2-91bb-290f-5835-f55a89c895fb}">
+        <p14:section name="Answers" id="{95ab27c2-7ed5-e98c-e06e-8f4caac1c91d}">
           <p14:sldIdLst>
             <p14:sldId id="268"/>
             <p14:sldId id="269"/>
